--- a/GitAula/Aula01/1) Ciclo do Software e Versionamento.pptx
+++ b/GitAula/Aula01/1) Ciclo do Software e Versionamento.pptx
@@ -242,7 +242,7 @@
           <a:p>
             <a:fld id="{65CBB322-A32E-46D6-B1B8-92BDA86A37F4}" type="datetimeFigureOut">
               <a:rPr lang="pt-BR" smtClean="0"/>
-              <a:t>08/04/2026</a:t>
+              <a:t>10/04/2026</a:t>
             </a:fld>
             <a:endParaRPr lang="pt-BR"/>
           </a:p>
@@ -400,7 +400,7 @@
           <a:p>
             <a:fld id="{9F6269C1-9FEB-4722-AA2E-4E756E94FC4D}" type="slidenum">
               <a:rPr lang="pt-BR" smtClean="0"/>
-              <a:t>‹#›</a:t>
+              <a:t>‹nº›</a:t>
             </a:fld>
             <a:endParaRPr lang="pt-BR"/>
           </a:p>
@@ -18325,21 +18325,21 @@
               <a:buChar char="•"/>
             </a:pPr>
             <a:r>
-              <a:rPr lang="pt-BR" sz="2400" b="1" err="1">
+              <a:rPr lang="pt-BR" sz="2400" b="1" dirty="0" err="1">
                 <a:latin typeface="Calibri" panose="020F0502020204030204" pitchFamily="34" charset="0"/>
                 <a:cs typeface="Calibri" panose="020F0502020204030204" pitchFamily="34" charset="0"/>
               </a:rPr>
               <a:t>echo</a:t>
             </a:r>
             <a:r>
-              <a:rPr lang="pt-BR" sz="2400" b="1">
+              <a:rPr lang="pt-BR" sz="2400" b="1" dirty="0">
                 <a:latin typeface="Calibri" panose="020F0502020204030204" pitchFamily="34" charset="0"/>
                 <a:cs typeface="Calibri" panose="020F0502020204030204" pitchFamily="34" charset="0"/>
               </a:rPr>
               <a:t> "# tutorial" &gt;&gt; README.md</a:t>
             </a:r>
             <a:r>
-              <a:rPr lang="pt-BR" sz="2400">
+              <a:rPr lang="pt-BR" sz="2400" dirty="0">
                 <a:latin typeface="Calibri" panose="020F0502020204030204" pitchFamily="34" charset="0"/>
                 <a:cs typeface="Calibri" panose="020F0502020204030204" pitchFamily="34" charset="0"/>
               </a:rPr>
@@ -18355,28 +18355,35 @@
               <a:buChar char="•"/>
             </a:pPr>
             <a:r>
-              <a:rPr lang="pt-BR" sz="2400" b="1">
-                <a:latin typeface="Calibri" panose="020F0502020204030204" pitchFamily="34" charset="0"/>
-                <a:cs typeface="Calibri" panose="020F0502020204030204" pitchFamily="34" charset="0"/>
-              </a:rPr>
-              <a:t>git </a:t>
-            </a:r>
-            <a:r>
-              <a:rPr lang="pt-BR" sz="2400" b="1" err="1">
+              <a:rPr lang="pt-BR" sz="2400" b="1" dirty="0" err="1">
+                <a:latin typeface="Calibri" panose="020F0502020204030204" pitchFamily="34" charset="0"/>
+                <a:cs typeface="Calibri" panose="020F0502020204030204" pitchFamily="34" charset="0"/>
+              </a:rPr>
+              <a:t>git</a:t>
+            </a:r>
+            <a:r>
+              <a:rPr lang="pt-BR" sz="2400" b="1" dirty="0">
+                <a:latin typeface="Calibri" panose="020F0502020204030204" pitchFamily="34" charset="0"/>
+                <a:cs typeface="Calibri" panose="020F0502020204030204" pitchFamily="34" charset="0"/>
+              </a:rPr>
+              <a:t> </a:t>
+            </a:r>
+            <a:r>
+              <a:rPr lang="pt-BR" sz="2400" b="1" dirty="0" err="1">
                 <a:latin typeface="Calibri" panose="020F0502020204030204" pitchFamily="34" charset="0"/>
                 <a:cs typeface="Calibri" panose="020F0502020204030204" pitchFamily="34" charset="0"/>
               </a:rPr>
               <a:t>init</a:t>
             </a:r>
             <a:r>
-              <a:rPr lang="pt-BR" sz="2400" b="1">
+              <a:rPr lang="pt-BR" sz="2400" b="1" dirty="0">
                 <a:latin typeface="Calibri" panose="020F0502020204030204" pitchFamily="34" charset="0"/>
                 <a:cs typeface="Calibri" panose="020F0502020204030204" pitchFamily="34" charset="0"/>
               </a:rPr>
               <a:t> </a:t>
             </a:r>
             <a:r>
-              <a:rPr lang="pt-BR" sz="2400">
+              <a:rPr lang="pt-BR" sz="2400" dirty="0">
                 <a:latin typeface="Calibri" panose="020F0502020204030204" pitchFamily="34" charset="0"/>
                 <a:cs typeface="Calibri" panose="020F0502020204030204" pitchFamily="34" charset="0"/>
               </a:rPr>
@@ -18392,18 +18399,53 @@
               <a:buChar char="•"/>
             </a:pPr>
             <a:r>
-              <a:rPr lang="pt-BR" sz="2400" b="1">
-                <a:latin typeface="Calibri" panose="020F0502020204030204" pitchFamily="34" charset="0"/>
-                <a:cs typeface="Calibri" panose="020F0502020204030204" pitchFamily="34" charset="0"/>
-              </a:rPr>
-              <a:t>git add . </a:t>
-            </a:r>
-            <a:r>
-              <a:rPr lang="pt-BR" sz="2400">
-                <a:latin typeface="Calibri" panose="020F0502020204030204" pitchFamily="34" charset="0"/>
-                <a:cs typeface="Calibri" panose="020F0502020204030204" pitchFamily="34" charset="0"/>
-              </a:rPr>
-              <a:t>Adiciona todos os arquivos na Staging Area</a:t>
+              <a:rPr lang="pt-BR" sz="2400" b="1" dirty="0" err="1">
+                <a:latin typeface="Calibri" panose="020F0502020204030204" pitchFamily="34" charset="0"/>
+                <a:cs typeface="Calibri" panose="020F0502020204030204" pitchFamily="34" charset="0"/>
+              </a:rPr>
+              <a:t>git</a:t>
+            </a:r>
+            <a:r>
+              <a:rPr lang="pt-BR" sz="2400" b="1" dirty="0">
+                <a:latin typeface="Calibri" panose="020F0502020204030204" pitchFamily="34" charset="0"/>
+                <a:cs typeface="Calibri" panose="020F0502020204030204" pitchFamily="34" charset="0"/>
+              </a:rPr>
+              <a:t> </a:t>
+            </a:r>
+            <a:r>
+              <a:rPr lang="pt-BR" sz="2400" b="1" dirty="0" err="1">
+                <a:latin typeface="Calibri" panose="020F0502020204030204" pitchFamily="34" charset="0"/>
+                <a:cs typeface="Calibri" panose="020F0502020204030204" pitchFamily="34" charset="0"/>
+              </a:rPr>
+              <a:t>add</a:t>
+            </a:r>
+            <a:r>
+              <a:rPr lang="pt-BR" sz="2400" b="1" dirty="0">
+                <a:latin typeface="Calibri" panose="020F0502020204030204" pitchFamily="34" charset="0"/>
+                <a:cs typeface="Calibri" panose="020F0502020204030204" pitchFamily="34" charset="0"/>
+              </a:rPr>
+              <a:t> . </a:t>
+            </a:r>
+            <a:r>
+              <a:rPr lang="pt-BR" sz="2400" dirty="0">
+                <a:latin typeface="Calibri" panose="020F0502020204030204" pitchFamily="34" charset="0"/>
+                <a:cs typeface="Calibri" panose="020F0502020204030204" pitchFamily="34" charset="0"/>
+              </a:rPr>
+              <a:t>Adiciona todos os arquivos na </a:t>
+            </a:r>
+            <a:r>
+              <a:rPr lang="pt-BR" sz="2400" dirty="0" err="1">
+                <a:latin typeface="Calibri" panose="020F0502020204030204" pitchFamily="34" charset="0"/>
+                <a:cs typeface="Calibri" panose="020F0502020204030204" pitchFamily="34" charset="0"/>
+              </a:rPr>
+              <a:t>Staging</a:t>
+            </a:r>
+            <a:r>
+              <a:rPr lang="pt-BR" sz="2400" dirty="0">
+                <a:latin typeface="Calibri" panose="020F0502020204030204" pitchFamily="34" charset="0"/>
+                <a:cs typeface="Calibri" panose="020F0502020204030204" pitchFamily="34" charset="0"/>
+              </a:rPr>
+              <a:t> Area</a:t>
             </a:r>
           </a:p>
           <a:p>
@@ -18415,18 +18457,81 @@
               <a:buChar char="•"/>
             </a:pPr>
             <a:r>
-              <a:rPr lang="pt-BR" sz="2400" b="1">
-                <a:latin typeface="Calibri" panose="020F0502020204030204" pitchFamily="34" charset="0"/>
-                <a:cs typeface="Calibri" panose="020F0502020204030204" pitchFamily="34" charset="0"/>
-              </a:rPr>
-              <a:t>git commit –m “first commit” </a:t>
-            </a:r>
-            <a:r>
-              <a:rPr lang="pt-BR" sz="2400">
-                <a:latin typeface="Calibri" panose="020F0502020204030204" pitchFamily="34" charset="0"/>
-                <a:cs typeface="Calibri" panose="020F0502020204030204" pitchFamily="34" charset="0"/>
-              </a:rPr>
-              <a:t>Faz o commit dos arquivos com uma mensagem</a:t>
+              <a:rPr lang="pt-BR" sz="2400" b="1" dirty="0" err="1">
+                <a:latin typeface="Calibri" panose="020F0502020204030204" pitchFamily="34" charset="0"/>
+                <a:cs typeface="Calibri" panose="020F0502020204030204" pitchFamily="34" charset="0"/>
+              </a:rPr>
+              <a:t>git</a:t>
+            </a:r>
+            <a:r>
+              <a:rPr lang="pt-BR" sz="2400" b="1" dirty="0">
+                <a:latin typeface="Calibri" panose="020F0502020204030204" pitchFamily="34" charset="0"/>
+                <a:cs typeface="Calibri" panose="020F0502020204030204" pitchFamily="34" charset="0"/>
+              </a:rPr>
+              <a:t> </a:t>
+            </a:r>
+            <a:r>
+              <a:rPr lang="pt-BR" sz="2400" b="1" dirty="0" err="1">
+                <a:latin typeface="Calibri" panose="020F0502020204030204" pitchFamily="34" charset="0"/>
+                <a:cs typeface="Calibri" panose="020F0502020204030204" pitchFamily="34" charset="0"/>
+              </a:rPr>
+              <a:t>commit</a:t>
+            </a:r>
+            <a:r>
+              <a:rPr lang="pt-BR" sz="2400" b="1" dirty="0">
+                <a:latin typeface="Calibri" panose="020F0502020204030204" pitchFamily="34" charset="0"/>
+                <a:cs typeface="Calibri" panose="020F0502020204030204" pitchFamily="34" charset="0"/>
+              </a:rPr>
+              <a:t> –m “</a:t>
+            </a:r>
+            <a:r>
+              <a:rPr lang="pt-BR" sz="2400" b="1" dirty="0" err="1">
+                <a:latin typeface="Calibri" panose="020F0502020204030204" pitchFamily="34" charset="0"/>
+                <a:cs typeface="Calibri" panose="020F0502020204030204" pitchFamily="34" charset="0"/>
+              </a:rPr>
+              <a:t>first</a:t>
+            </a:r>
+            <a:r>
+              <a:rPr lang="pt-BR" sz="2400" b="1" dirty="0">
+                <a:latin typeface="Calibri" panose="020F0502020204030204" pitchFamily="34" charset="0"/>
+                <a:cs typeface="Calibri" panose="020F0502020204030204" pitchFamily="34" charset="0"/>
+              </a:rPr>
+              <a:t> </a:t>
+            </a:r>
+            <a:r>
+              <a:rPr lang="pt-BR" sz="2400" b="1" dirty="0" err="1">
+                <a:latin typeface="Calibri" panose="020F0502020204030204" pitchFamily="34" charset="0"/>
+                <a:cs typeface="Calibri" panose="020F0502020204030204" pitchFamily="34" charset="0"/>
+              </a:rPr>
+              <a:t>commit</a:t>
+            </a:r>
+            <a:r>
+              <a:rPr lang="pt-BR" sz="2400" b="1" dirty="0">
+                <a:latin typeface="Calibri" panose="020F0502020204030204" pitchFamily="34" charset="0"/>
+                <a:cs typeface="Calibri" panose="020F0502020204030204" pitchFamily="34" charset="0"/>
+              </a:rPr>
+              <a:t>” </a:t>
+            </a:r>
+            <a:r>
+              <a:rPr lang="pt-BR" sz="2400" dirty="0">
+                <a:latin typeface="Calibri" panose="020F0502020204030204" pitchFamily="34" charset="0"/>
+                <a:cs typeface="Calibri" panose="020F0502020204030204" pitchFamily="34" charset="0"/>
+              </a:rPr>
+              <a:t>Faz o </a:t>
+            </a:r>
+            <a:r>
+              <a:rPr lang="pt-BR" sz="2400" dirty="0" err="1">
+                <a:latin typeface="Calibri" panose="020F0502020204030204" pitchFamily="34" charset="0"/>
+                <a:cs typeface="Calibri" panose="020F0502020204030204" pitchFamily="34" charset="0"/>
+              </a:rPr>
+              <a:t>commit</a:t>
+            </a:r>
+            <a:r>
+              <a:rPr lang="pt-BR" sz="2400" dirty="0">
+                <a:latin typeface="Calibri" panose="020F0502020204030204" pitchFamily="34" charset="0"/>
+                <a:cs typeface="Calibri" panose="020F0502020204030204" pitchFamily="34" charset="0"/>
+              </a:rPr>
+              <a:t> dos arquivos com uma mensagem</a:t>
             </a:r>
           </a:p>
           <a:p>
@@ -18438,18 +18543,81 @@
               <a:buChar char="•"/>
             </a:pPr>
             <a:r>
-              <a:rPr lang="pt-BR" sz="2400" b="1">
-                <a:latin typeface="Calibri" panose="020F0502020204030204" pitchFamily="34" charset="0"/>
-                <a:cs typeface="Calibri" panose="020F0502020204030204" pitchFamily="34" charset="0"/>
-              </a:rPr>
-              <a:t>git branch –M main </a:t>
-            </a:r>
-            <a:r>
-              <a:rPr lang="pt-BR" sz="2400">
-                <a:latin typeface="Calibri" panose="020F0502020204030204" pitchFamily="34" charset="0"/>
-                <a:cs typeface="Calibri" panose="020F0502020204030204" pitchFamily="34" charset="0"/>
-              </a:rPr>
-              <a:t>Renomeia a branch principal para main (nomenclatura moderna)</a:t>
+              <a:rPr lang="pt-BR" sz="2400" b="1" dirty="0" err="1">
+                <a:latin typeface="Calibri" panose="020F0502020204030204" pitchFamily="34" charset="0"/>
+                <a:cs typeface="Calibri" panose="020F0502020204030204" pitchFamily="34" charset="0"/>
+              </a:rPr>
+              <a:t>git</a:t>
+            </a:r>
+            <a:r>
+              <a:rPr lang="pt-BR" sz="2400" b="1" dirty="0">
+                <a:latin typeface="Calibri" panose="020F0502020204030204" pitchFamily="34" charset="0"/>
+                <a:cs typeface="Calibri" panose="020F0502020204030204" pitchFamily="34" charset="0"/>
+              </a:rPr>
+              <a:t> </a:t>
+            </a:r>
+            <a:r>
+              <a:rPr lang="pt-BR" sz="2400" b="1" dirty="0" err="1">
+                <a:latin typeface="Calibri" panose="020F0502020204030204" pitchFamily="34" charset="0"/>
+                <a:cs typeface="Calibri" panose="020F0502020204030204" pitchFamily="34" charset="0"/>
+              </a:rPr>
+              <a:t>branch</a:t>
+            </a:r>
+            <a:r>
+              <a:rPr lang="pt-BR" sz="2400" b="1" dirty="0">
+                <a:latin typeface="Calibri" panose="020F0502020204030204" pitchFamily="34" charset="0"/>
+                <a:cs typeface="Calibri" panose="020F0502020204030204" pitchFamily="34" charset="0"/>
+              </a:rPr>
+              <a:t> –M </a:t>
+            </a:r>
+            <a:r>
+              <a:rPr lang="pt-BR" sz="2400" b="1" dirty="0" err="1">
+                <a:latin typeface="Calibri" panose="020F0502020204030204" pitchFamily="34" charset="0"/>
+                <a:cs typeface="Calibri" panose="020F0502020204030204" pitchFamily="34" charset="0"/>
+              </a:rPr>
+              <a:t>main</a:t>
+            </a:r>
+            <a:r>
+              <a:rPr lang="pt-BR" sz="2400" b="1" dirty="0">
+                <a:latin typeface="Calibri" panose="020F0502020204030204" pitchFamily="34" charset="0"/>
+                <a:cs typeface="Calibri" panose="020F0502020204030204" pitchFamily="34" charset="0"/>
+              </a:rPr>
+              <a:t> </a:t>
+            </a:r>
+            <a:r>
+              <a:rPr lang="pt-BR" sz="2400" dirty="0">
+                <a:latin typeface="Calibri" panose="020F0502020204030204" pitchFamily="34" charset="0"/>
+                <a:cs typeface="Calibri" panose="020F0502020204030204" pitchFamily="34" charset="0"/>
+              </a:rPr>
+              <a:t>Renomeia a </a:t>
+            </a:r>
+            <a:r>
+              <a:rPr lang="pt-BR" sz="2400" dirty="0" err="1">
+                <a:latin typeface="Calibri" panose="020F0502020204030204" pitchFamily="34" charset="0"/>
+                <a:cs typeface="Calibri" panose="020F0502020204030204" pitchFamily="34" charset="0"/>
+              </a:rPr>
+              <a:t>branch</a:t>
+            </a:r>
+            <a:r>
+              <a:rPr lang="pt-BR" sz="2400" dirty="0">
+                <a:latin typeface="Calibri" panose="020F0502020204030204" pitchFamily="34" charset="0"/>
+                <a:cs typeface="Calibri" panose="020F0502020204030204" pitchFamily="34" charset="0"/>
+              </a:rPr>
+              <a:t> principal para </a:t>
+            </a:r>
+            <a:r>
+              <a:rPr lang="pt-BR" sz="2400" dirty="0" err="1">
+                <a:latin typeface="Calibri" panose="020F0502020204030204" pitchFamily="34" charset="0"/>
+                <a:cs typeface="Calibri" panose="020F0502020204030204" pitchFamily="34" charset="0"/>
+              </a:rPr>
+              <a:t>main</a:t>
+            </a:r>
+            <a:r>
+              <a:rPr lang="pt-BR" sz="2400" dirty="0">
+                <a:latin typeface="Calibri" panose="020F0502020204030204" pitchFamily="34" charset="0"/>
+                <a:cs typeface="Calibri" panose="020F0502020204030204" pitchFamily="34" charset="0"/>
+              </a:rPr>
+              <a:t> (nomenclatura moderna)</a:t>
             </a:r>
           </a:p>
           <a:p>
@@ -18461,14 +18629,49 @@
               <a:buChar char="•"/>
             </a:pPr>
             <a:r>
-              <a:rPr lang="pt-BR" sz="2400" b="1">
-                <a:latin typeface="Calibri" panose="020F0502020204030204" pitchFamily="34" charset="0"/>
-                <a:cs typeface="Calibri" panose="020F0502020204030204" pitchFamily="34" charset="0"/>
-              </a:rPr>
-              <a:t>git remote add...  </a:t>
-            </a:r>
-            <a:r>
-              <a:rPr lang="pt-BR" sz="2400">
+              <a:rPr lang="pt-BR" sz="2400" b="1" dirty="0" err="1">
+                <a:latin typeface="Calibri" panose="020F0502020204030204" pitchFamily="34" charset="0"/>
+                <a:cs typeface="Calibri" panose="020F0502020204030204" pitchFamily="34" charset="0"/>
+              </a:rPr>
+              <a:t>git</a:t>
+            </a:r>
+            <a:r>
+              <a:rPr lang="pt-BR" sz="2400" b="1" dirty="0">
+                <a:latin typeface="Calibri" panose="020F0502020204030204" pitchFamily="34" charset="0"/>
+                <a:cs typeface="Calibri" panose="020F0502020204030204" pitchFamily="34" charset="0"/>
+              </a:rPr>
+              <a:t> </a:t>
+            </a:r>
+            <a:r>
+              <a:rPr lang="pt-BR" sz="2400" b="1" dirty="0" err="1">
+                <a:latin typeface="Calibri" panose="020F0502020204030204" pitchFamily="34" charset="0"/>
+                <a:cs typeface="Calibri" panose="020F0502020204030204" pitchFamily="34" charset="0"/>
+              </a:rPr>
+              <a:t>remote</a:t>
+            </a:r>
+            <a:r>
+              <a:rPr lang="pt-BR" sz="2400" b="1" dirty="0">
+                <a:latin typeface="Calibri" panose="020F0502020204030204" pitchFamily="34" charset="0"/>
+                <a:cs typeface="Calibri" panose="020F0502020204030204" pitchFamily="34" charset="0"/>
+              </a:rPr>
+              <a:t> </a:t>
+            </a:r>
+            <a:r>
+              <a:rPr lang="pt-BR" sz="2400" b="1" dirty="0" err="1">
+                <a:latin typeface="Calibri" panose="020F0502020204030204" pitchFamily="34" charset="0"/>
+                <a:cs typeface="Calibri" panose="020F0502020204030204" pitchFamily="34" charset="0"/>
+              </a:rPr>
+              <a:t>add</a:t>
+            </a:r>
+            <a:r>
+              <a:rPr lang="pt-BR" sz="2400" b="1" dirty="0">
+                <a:latin typeface="Calibri" panose="020F0502020204030204" pitchFamily="34" charset="0"/>
+                <a:cs typeface="Calibri" panose="020F0502020204030204" pitchFamily="34" charset="0"/>
+              </a:rPr>
+              <a:t>...  </a:t>
+            </a:r>
+            <a:r>
+              <a:rPr lang="pt-BR" sz="2400" dirty="0">
                 <a:latin typeface="Calibri" panose="020F0502020204030204" pitchFamily="34" charset="0"/>
                 <a:cs typeface="Calibri" panose="020F0502020204030204" pitchFamily="34" charset="0"/>
               </a:rPr>
@@ -18484,18 +18687,95 @@
               <a:buChar char="•"/>
             </a:pPr>
             <a:r>
-              <a:rPr lang="pt-BR" sz="2400" b="1">
-                <a:latin typeface="Calibri" panose="020F0502020204030204" pitchFamily="34" charset="0"/>
-                <a:cs typeface="Calibri" panose="020F0502020204030204" pitchFamily="34" charset="0"/>
-              </a:rPr>
-              <a:t>git push –u origin main </a:t>
-            </a:r>
-            <a:r>
-              <a:rPr lang="pt-BR" sz="2400">
-                <a:latin typeface="Calibri" panose="020F0502020204030204" pitchFamily="34" charset="0"/>
-                <a:cs typeface="Calibri" panose="020F0502020204030204" pitchFamily="34" charset="0"/>
-              </a:rPr>
-              <a:t>Faz o push do commit para o GitHub</a:t>
+              <a:rPr lang="pt-BR" sz="2400" b="1" dirty="0" err="1">
+                <a:latin typeface="Calibri" panose="020F0502020204030204" pitchFamily="34" charset="0"/>
+                <a:cs typeface="Calibri" panose="020F0502020204030204" pitchFamily="34" charset="0"/>
+              </a:rPr>
+              <a:t>git</a:t>
+            </a:r>
+            <a:r>
+              <a:rPr lang="pt-BR" sz="2400" b="1" dirty="0">
+                <a:latin typeface="Calibri" panose="020F0502020204030204" pitchFamily="34" charset="0"/>
+                <a:cs typeface="Calibri" panose="020F0502020204030204" pitchFamily="34" charset="0"/>
+              </a:rPr>
+              <a:t> </a:t>
+            </a:r>
+            <a:r>
+              <a:rPr lang="pt-BR" sz="2400" b="1" dirty="0" err="1">
+                <a:latin typeface="Calibri" panose="020F0502020204030204" pitchFamily="34" charset="0"/>
+                <a:cs typeface="Calibri" panose="020F0502020204030204" pitchFamily="34" charset="0"/>
+              </a:rPr>
+              <a:t>push</a:t>
+            </a:r>
+            <a:r>
+              <a:rPr lang="pt-BR" sz="2400" b="1" dirty="0">
+                <a:latin typeface="Calibri" panose="020F0502020204030204" pitchFamily="34" charset="0"/>
+                <a:cs typeface="Calibri" panose="020F0502020204030204" pitchFamily="34" charset="0"/>
+              </a:rPr>
+              <a:t> –u </a:t>
+            </a:r>
+            <a:r>
+              <a:rPr lang="pt-BR" sz="2400" b="1" dirty="0" err="1">
+                <a:latin typeface="Calibri" panose="020F0502020204030204" pitchFamily="34" charset="0"/>
+                <a:cs typeface="Calibri" panose="020F0502020204030204" pitchFamily="34" charset="0"/>
+              </a:rPr>
+              <a:t>origin</a:t>
+            </a:r>
+            <a:r>
+              <a:rPr lang="pt-BR" sz="2400" b="1" dirty="0">
+                <a:latin typeface="Calibri" panose="020F0502020204030204" pitchFamily="34" charset="0"/>
+                <a:cs typeface="Calibri" panose="020F0502020204030204" pitchFamily="34" charset="0"/>
+              </a:rPr>
+              <a:t> </a:t>
+            </a:r>
+            <a:r>
+              <a:rPr lang="pt-BR" sz="2400" b="1" dirty="0" err="1">
+                <a:latin typeface="Calibri" panose="020F0502020204030204" pitchFamily="34" charset="0"/>
+                <a:cs typeface="Calibri" panose="020F0502020204030204" pitchFamily="34" charset="0"/>
+              </a:rPr>
+              <a:t>main</a:t>
+            </a:r>
+            <a:r>
+              <a:rPr lang="pt-BR" sz="2400" b="1" dirty="0">
+                <a:latin typeface="Calibri" panose="020F0502020204030204" pitchFamily="34" charset="0"/>
+                <a:cs typeface="Calibri" panose="020F0502020204030204" pitchFamily="34" charset="0"/>
+              </a:rPr>
+              <a:t> </a:t>
+            </a:r>
+            <a:r>
+              <a:rPr lang="pt-BR" sz="2400" dirty="0">
+                <a:latin typeface="Calibri" panose="020F0502020204030204" pitchFamily="34" charset="0"/>
+                <a:cs typeface="Calibri" panose="020F0502020204030204" pitchFamily="34" charset="0"/>
+              </a:rPr>
+              <a:t>Faz o </a:t>
+            </a:r>
+            <a:r>
+              <a:rPr lang="pt-BR" sz="2400" dirty="0" err="1">
+                <a:latin typeface="Calibri" panose="020F0502020204030204" pitchFamily="34" charset="0"/>
+                <a:cs typeface="Calibri" panose="020F0502020204030204" pitchFamily="34" charset="0"/>
+              </a:rPr>
+              <a:t>push</a:t>
+            </a:r>
+            <a:r>
+              <a:rPr lang="pt-BR" sz="2400" dirty="0">
+                <a:latin typeface="Calibri" panose="020F0502020204030204" pitchFamily="34" charset="0"/>
+                <a:cs typeface="Calibri" panose="020F0502020204030204" pitchFamily="34" charset="0"/>
+              </a:rPr>
+              <a:t> do </a:t>
+            </a:r>
+            <a:r>
+              <a:rPr lang="pt-BR" sz="2400" dirty="0" err="1">
+                <a:latin typeface="Calibri" panose="020F0502020204030204" pitchFamily="34" charset="0"/>
+                <a:cs typeface="Calibri" panose="020F0502020204030204" pitchFamily="34" charset="0"/>
+              </a:rPr>
+              <a:t>commit</a:t>
+            </a:r>
+            <a:r>
+              <a:rPr lang="pt-BR" sz="2400" dirty="0">
+                <a:latin typeface="Calibri" panose="020F0502020204030204" pitchFamily="34" charset="0"/>
+                <a:cs typeface="Calibri" panose="020F0502020204030204" pitchFamily="34" charset="0"/>
+              </a:rPr>
+              <a:t> para o GitHub</a:t>
             </a:r>
           </a:p>
         </p:txBody>
